--- a/dist/초5/수학/곱셈과어림/초5_수학_곱셈과어림_05_소수의곱셈_학생용.pptx
+++ b/dist/초5/수학/곱셈과어림/초5_수학_곱셈과어림_05_소수의곱셈_학생용.pptx
@@ -120,13 +120,13 @@
   <p:extLst>
     <p:ext uri="{521415D9-36F7-43E2-AB2F-B90AF26B5E84}">
       <p14:sectionLst xmlns:p14="http://schemas.microsoft.com/office/powerpoint/2010/main">
-        <p14:section name="도입" id="{99ca31f1-643f-0b5c-fe54-1758dbeef2da}">
+        <p14:section name="도입" id="{4fa03e5d-37c3-a7bc-f863-2f860de8faba}">
           <p14:sldIdLst>
             <p14:sldId id="256"/>
             <p14:sldId id="257"/>
           </p14:sldIdLst>
         </p14:section>
-        <p14:section name="개념" id="{8eaabe1b-687a-dc57-55ae-8cc0087409f7}">
+        <p14:section name="개념" id="{b89e28ca-66fa-ba94-ce03-edcac2983271}">
           <p14:sldIdLst>
             <p14:sldId id="258"/>
             <p14:sldId id="259"/>
@@ -135,31 +135,31 @@
             <p14:sldId id="263"/>
           </p14:sldIdLst>
         </p14:section>
-        <p14:section name="연습" id="{344df8c8-4e97-c7eb-ba5d-ccf8278690fe}">
+        <p14:section name="연습" id="{ab6b0344-f836-f434-3f58-ba85f18813b5}">
           <p14:sldIdLst>
             <p14:sldId id="260"/>
             <p14:sldId id="264"/>
             <p14:sldId id="265"/>
           </p14:sldIdLst>
         </p14:section>
-        <p14:section name="개념" id="{450276ef-ff6e-fba4-3e98-b3f8f0bc5b02}">
+        <p14:section name="개념" id="{8c56f12d-c8d4-6f42-981c-1154967292dd}">
           <p14:sldIdLst/>
         </p14:section>
-        <p14:section name="연습" id="{83a8a1c6-c1b1-3802-b00e-3128414b50d9}">
+        <p14:section name="연습" id="{57d43123-1bdb-9f88-337a-3af50eb1fad4}">
           <p14:sldIdLst/>
         </p14:section>
-        <p14:section name="확인" id="{264545d4-2f5f-b0d6-19d4-805d50cc92af}">
+        <p14:section name="확인" id="{648339c8-3a98-4a5a-6480-e0659589a349}">
           <p14:sldIdLst>
             <p14:sldId id="266"/>
             <p14:sldId id="267"/>
           </p14:sldIdLst>
         </p14:section>
-        <p14:section name="정리" id="{ea74aec7-4ef3-69c0-11db-d08061f18c59}">
+        <p14:section name="정리" id="{0a7f2562-f3f7-7d14-f9da-463af41f0c2b}">
           <p14:sldIdLst>
             <p14:sldId id="268"/>
           </p14:sldIdLst>
         </p14:section>
-        <p14:section name="보충" id="{7c1666ff-5201-5f4c-7106-34f9d5b6dba5}">
+        <p14:section name="보충" id="{b0172851-cb9b-fbd3-42c9-5c0851119359}">
           <p14:sldIdLst>
             <p14:sldId id="269"/>
           </p14:sldIdLst>
@@ -3175,12 +3175,12 @@
         </p:nvSpPr>
         <p:spPr>
           <a:xfrm>
-            <a:off x="548640" y="5021072"/>
-            <a:ext cx="11091672" cy="1196848"/>
+            <a:off x="548640" y="5349240"/>
+            <a:ext cx="11091672" cy="868680"/>
           </a:xfrm>
           <a:prstGeom prst="roundRect">
             <a:avLst>
-              <a:gd name="adj" fmla="val 9168"/>
+              <a:gd name="adj" fmla="val 12632"/>
             </a:avLst>
           </a:prstGeom>
           <a:solidFill>
@@ -3202,8 +3202,8 @@
         </p:nvSpPr>
         <p:spPr>
           <a:xfrm>
-            <a:off x="822960" y="5158232"/>
-            <a:ext cx="10543032" cy="922528"/>
+            <a:off x="822960" y="5486400"/>
+            <a:ext cx="10543032" cy="594360"/>
           </a:xfrm>
           <a:prstGeom prst="rect">
             <a:avLst/>
@@ -3230,7 +3230,7 @@
                 <a:ea typeface="맑은 고딕" pitchFamily="34" charset="-122"/>
                 <a:cs typeface="맑은 고딕" pitchFamily="34" charset="-120"/>
               </a:rPr>
-              <a:t>어림해 봐요. 1.2의 반(0.5배)은 6에 가까울까요, 0.6에 가까울까요?</a:t>
+              <a:t>1.2의 반(0.5배)은 6과 0.6 중 어디에 가까울까요?</a:t>
             </a:r>
             <a:endParaRPr lang="ko-KR" sz="2800" dirty="0"/>
           </a:p>
@@ -3292,7 +3292,7 @@
         <p:spPr>
           <a:xfrm>
             <a:off x="548640" y="3154680"/>
-            <a:ext cx="5362956" cy="1637792"/>
+            <a:ext cx="5362956" cy="1965960"/>
           </a:xfrm>
           <a:prstGeom prst="rect">
             <a:avLst/>
@@ -3412,7 +3412,7 @@
         <p:spPr>
           <a:xfrm>
             <a:off x="6277356" y="3154680"/>
-            <a:ext cx="5362956" cy="1637792"/>
+            <a:ext cx="5362956" cy="1965960"/>
           </a:xfrm>
           <a:prstGeom prst="rect">
             <a:avLst/>
@@ -4278,8 +4278,8 @@
       </p:sp>
       <p:sp>
         <p:nvSpPr>
-          <p:cNvPr id="7" name="S13-card157"/>
-          <p:cNvSpPr/>
+          <p:cNvPr id="7" name="S13-eqtext157"/>
+          <p:cNvSpPr txBox="1"/>
           <p:nvPr/>
         </p:nvSpPr>
         <p:spPr>
@@ -4287,33 +4287,6 @@
             <a:off x="548640" y="2715768"/>
             <a:ext cx="3453384" cy="2404872"/>
           </a:xfrm>
-          <a:prstGeom prst="roundRect">
-            <a:avLst>
-              <a:gd name="adj" fmla="val 4563"/>
-            </a:avLst>
-          </a:prstGeom>
-          <a:solidFill>
-            <a:srgbClr val="EAF3F1"/>
-          </a:solidFill>
-          <a:ln w="12700">
-            <a:solidFill>
-              <a:srgbClr val="EAF3F1"/>
-            </a:solidFill>
-            <a:prstDash val="solid"/>
-          </a:ln>
-        </p:spPr>
-      </p:sp>
-      <p:sp>
-        <p:nvSpPr>
-          <p:cNvPr id="8" name="S13-cardtext158"/>
-          <p:cNvSpPr txBox="1"/>
-          <p:nvPr/>
-        </p:nvSpPr>
-        <p:spPr>
-          <a:xfrm>
-            <a:off x="822960" y="2852928"/>
-            <a:ext cx="2904744" cy="2130552"/>
-          </a:xfrm>
           <a:prstGeom prst="rect">
             <a:avLst/>
           </a:prstGeom>
@@ -4324,14 +4297,11 @@
           <a:bodyPr wrap="square" lIns="0" tIns="0" rIns="0" bIns="0" rtlCol="0" anchor="ctr"/>
           <a:lstStyle/>
           <a:p>
-            <a:pPr eaLnBrk="0" indent="0" marL="0">
-              <a:spcAft>
-                <a:spcPts val="600"/>
-              </a:spcAft>
-              <a:buNone/>
-            </a:pPr>
-            <a:r>
-              <a:rPr lang="ko-KR" altLang="en-US" sz="2800" dirty="0">
+            <a:pPr eaLnBrk="0" algn="ctr" indent="0" marL="0">
+              <a:buNone/>
+            </a:pPr>
+            <a:r>
+              <a:rPr lang="ko-KR" altLang="en-US" sz="4800" b="1" dirty="0">
                 <a:solidFill>
                   <a:srgbClr val="1F2937"/>
                 </a:solidFill>
@@ -4341,13 +4311,13 @@
               </a:rPr>
               <a:t>46.8</a:t>
             </a:r>
-            <a:endParaRPr lang="ko-KR" sz="2800" dirty="0"/>
-          </a:p>
-        </p:txBody>
-      </p:sp>
-      <p:sp>
-        <p:nvSpPr>
-          <p:cNvPr id="9" name="S13-chip159"/>
+            <a:endParaRPr lang="ko-KR" sz="4800" dirty="0"/>
+          </a:p>
+        </p:txBody>
+      </p:sp>
+      <p:sp>
+        <p:nvSpPr>
+          <p:cNvPr id="8" name="S13-chip158"/>
           <p:cNvSpPr txBox="1"/>
           <p:nvPr/>
         </p:nvSpPr>
@@ -4394,8 +4364,8 @@
       </p:sp>
       <p:sp>
         <p:nvSpPr>
-          <p:cNvPr id="10" name="S13-card160"/>
-          <p:cNvSpPr/>
+          <p:cNvPr id="9" name="S13-eqtext159"/>
+          <p:cNvSpPr txBox="1"/>
           <p:nvPr/>
         </p:nvSpPr>
         <p:spPr>
@@ -4403,33 +4373,6 @@
             <a:off x="4367784" y="2715768"/>
             <a:ext cx="3453384" cy="2404872"/>
           </a:xfrm>
-          <a:prstGeom prst="roundRect">
-            <a:avLst>
-              <a:gd name="adj" fmla="val 4563"/>
-            </a:avLst>
-          </a:prstGeom>
-          <a:solidFill>
-            <a:srgbClr val="EAF3F1"/>
-          </a:solidFill>
-          <a:ln w="12700">
-            <a:solidFill>
-              <a:srgbClr val="EAF3F1"/>
-            </a:solidFill>
-            <a:prstDash val="solid"/>
-          </a:ln>
-        </p:spPr>
-      </p:sp>
-      <p:sp>
-        <p:nvSpPr>
-          <p:cNvPr id="11" name="S13-cardtext161"/>
-          <p:cNvSpPr txBox="1"/>
-          <p:nvPr/>
-        </p:nvSpPr>
-        <p:spPr>
-          <a:xfrm>
-            <a:off x="4642104" y="2852928"/>
-            <a:ext cx="2904744" cy="2130552"/>
-          </a:xfrm>
           <a:prstGeom prst="rect">
             <a:avLst/>
           </a:prstGeom>
@@ -4440,14 +4383,11 @@
           <a:bodyPr wrap="square" lIns="0" tIns="0" rIns="0" bIns="0" rtlCol="0" anchor="ctr"/>
           <a:lstStyle/>
           <a:p>
-            <a:pPr eaLnBrk="0" indent="0" marL="0">
-              <a:spcAft>
-                <a:spcPts val="600"/>
-              </a:spcAft>
-              <a:buNone/>
-            </a:pPr>
-            <a:r>
-              <a:rPr lang="ko-KR" altLang="en-US" sz="2800" dirty="0">
+            <a:pPr eaLnBrk="0" algn="ctr" indent="0" marL="0">
+              <a:buNone/>
+            </a:pPr>
+            <a:r>
+              <a:rPr lang="ko-KR" altLang="en-US" sz="4800" b="1" dirty="0">
                 <a:solidFill>
                   <a:srgbClr val="1F2937"/>
                 </a:solidFill>
@@ -4457,13 +4397,13 @@
               </a:rPr>
               <a:t>4.68</a:t>
             </a:r>
-            <a:endParaRPr lang="ko-KR" sz="2800" dirty="0"/>
-          </a:p>
-        </p:txBody>
-      </p:sp>
-      <p:sp>
-        <p:nvSpPr>
-          <p:cNvPr id="12" name="S13-chip162"/>
+            <a:endParaRPr lang="ko-KR" sz="4800" dirty="0"/>
+          </a:p>
+        </p:txBody>
+      </p:sp>
+      <p:sp>
+        <p:nvSpPr>
+          <p:cNvPr id="10" name="S13-chip160"/>
           <p:cNvSpPr txBox="1"/>
           <p:nvPr/>
         </p:nvSpPr>
@@ -4510,8 +4450,8 @@
       </p:sp>
       <p:sp>
         <p:nvSpPr>
-          <p:cNvPr id="13" name="S13-card163"/>
-          <p:cNvSpPr/>
+          <p:cNvPr id="11" name="S13-eqtext161"/>
+          <p:cNvSpPr txBox="1"/>
           <p:nvPr/>
         </p:nvSpPr>
         <p:spPr>
@@ -4519,33 +4459,6 @@
             <a:off x="8186928" y="2715768"/>
             <a:ext cx="3453384" cy="2404872"/>
           </a:xfrm>
-          <a:prstGeom prst="roundRect">
-            <a:avLst>
-              <a:gd name="adj" fmla="val 4563"/>
-            </a:avLst>
-          </a:prstGeom>
-          <a:solidFill>
-            <a:srgbClr val="EAF3F1"/>
-          </a:solidFill>
-          <a:ln w="12700">
-            <a:solidFill>
-              <a:srgbClr val="EAF3F1"/>
-            </a:solidFill>
-            <a:prstDash val="solid"/>
-          </a:ln>
-        </p:spPr>
-      </p:sp>
-      <p:sp>
-        <p:nvSpPr>
-          <p:cNvPr id="14" name="S13-cardtext164"/>
-          <p:cNvSpPr txBox="1"/>
-          <p:nvPr/>
-        </p:nvSpPr>
-        <p:spPr>
-          <a:xfrm>
-            <a:off x="8461248" y="2852928"/>
-            <a:ext cx="2904744" cy="2130552"/>
-          </a:xfrm>
           <a:prstGeom prst="rect">
             <a:avLst/>
           </a:prstGeom>
@@ -4556,14 +4469,11 @@
           <a:bodyPr wrap="square" lIns="0" tIns="0" rIns="0" bIns="0" rtlCol="0" anchor="ctr"/>
           <a:lstStyle/>
           <a:p>
-            <a:pPr eaLnBrk="0" indent="0" marL="0">
-              <a:spcAft>
-                <a:spcPts val="600"/>
-              </a:spcAft>
-              <a:buNone/>
-            </a:pPr>
-            <a:r>
-              <a:rPr lang="ko-KR" altLang="en-US" sz="2800" dirty="0">
+            <a:pPr eaLnBrk="0" algn="ctr" indent="0" marL="0">
+              <a:buNone/>
+            </a:pPr>
+            <a:r>
+              <a:rPr lang="ko-KR" altLang="en-US" sz="4800" b="1" dirty="0">
                 <a:solidFill>
                   <a:srgbClr val="1F2937"/>
                 </a:solidFill>
@@ -4573,7 +4483,7 @@
               </a:rPr>
               <a:t>0.468</a:t>
             </a:r>
-            <a:endParaRPr lang="ko-KR" sz="2800" dirty="0"/>
+            <a:endParaRPr lang="ko-KR" sz="4800" dirty="0"/>
           </a:p>
         </p:txBody>
       </p:sp>
@@ -4693,7 +4603,7 @@
       </p:sp>
       <p:sp>
         <p:nvSpPr>
-          <p:cNvPr id="3" name="S14-card165"/>
+          <p:cNvPr id="3" name="S14-card162"/>
           <p:cNvSpPr/>
           <p:nvPr/>
         </p:nvSpPr>
@@ -4720,7 +4630,7 @@
       </p:sp>
       <p:sp>
         <p:nvSpPr>
-          <p:cNvPr id="4" name="S14-cardtext166"/>
+          <p:cNvPr id="4" name="S14-cardtext163"/>
           <p:cNvSpPr txBox="1"/>
           <p:nvPr/>
         </p:nvSpPr>
@@ -4762,7 +4672,7 @@
       </p:sp>
       <p:sp>
         <p:nvSpPr>
-          <p:cNvPr id="5" name="S14-chip167"/>
+          <p:cNvPr id="5" name="S14-chip164"/>
           <p:cNvSpPr txBox="1"/>
           <p:nvPr/>
         </p:nvSpPr>
@@ -4809,7 +4719,7 @@
       </p:sp>
       <p:sp>
         <p:nvSpPr>
-          <p:cNvPr id="6" name="S14-chip168"/>
+          <p:cNvPr id="6" name="S14-chip165"/>
           <p:cNvSpPr txBox="1"/>
           <p:nvPr/>
         </p:nvSpPr>
@@ -4856,7 +4766,7 @@
       </p:sp>
       <p:sp>
         <p:nvSpPr>
-          <p:cNvPr id="7" name="S14-text169"/>
+          <p:cNvPr id="7" name="S14-text166"/>
           <p:cNvSpPr txBox="1"/>
           <p:nvPr/>
         </p:nvSpPr>
@@ -4895,7 +4805,7 @@
       </p:sp>
       <p:sp>
         <p:nvSpPr>
-          <p:cNvPr id="8" name="S14-eqtext170"/>
+          <p:cNvPr id="8" name="S14-eqtext167"/>
           <p:cNvSpPr txBox="1"/>
           <p:nvPr/>
         </p:nvSpPr>
@@ -4934,7 +4844,7 @@
       </p:sp>
       <p:sp>
         <p:nvSpPr>
-          <p:cNvPr id="9" name="S14-eqtext171"/>
+          <p:cNvPr id="9" name="S14-eqtext168"/>
           <p:cNvSpPr txBox="1"/>
           <p:nvPr/>
         </p:nvSpPr>
@@ -4973,7 +4883,7 @@
       </p:sp>
       <p:sp>
         <p:nvSpPr>
-          <p:cNvPr id="10" name="S14-eqtext172"/>
+          <p:cNvPr id="10" name="S14-eqtext169"/>
           <p:cNvSpPr txBox="1"/>
           <p:nvPr/>
         </p:nvSpPr>
@@ -5012,7 +4922,7 @@
       </p:sp>
       <p:sp>
         <p:nvSpPr>
-          <p:cNvPr id="11" name="S14-text173"/>
+          <p:cNvPr id="11" name="S14-text170"/>
           <p:cNvSpPr txBox="1"/>
           <p:nvPr/>
         </p:nvSpPr>
@@ -5165,7 +5075,7 @@
       </p:sp>
       <p:sp>
         <p:nvSpPr>
-          <p:cNvPr id="3" name="S15-text174"/>
+          <p:cNvPr id="3" name="S15-text171"/>
           <p:cNvSpPr txBox="1"/>
           <p:nvPr/>
         </p:nvSpPr>
@@ -5204,7 +5114,7 @@
       </p:sp>
       <p:sp>
         <p:nvSpPr>
-          <p:cNvPr id="4" name="S15-card175"/>
+          <p:cNvPr id="4" name="S15-card172"/>
           <p:cNvSpPr/>
           <p:nvPr/>
         </p:nvSpPr>
@@ -5231,7 +5141,7 @@
       </p:sp>
       <p:sp>
         <p:nvSpPr>
-          <p:cNvPr id="5" name="S15-cardtext176"/>
+          <p:cNvPr id="5" name="S15-cardtext173"/>
           <p:cNvSpPr txBox="1"/>
           <p:nvPr/>
         </p:nvSpPr>
@@ -5293,7 +5203,7 @@
       </p:sp>
       <p:sp>
         <p:nvSpPr>
-          <p:cNvPr id="6" name="S15-figure177" descr="0부터 1까지 0.1씩 눈금 수직선: 0에서 0.4씩 두 번 뛰어 0.8에 닿음"/>
+          <p:cNvPr id="6" name="S15-figure174" descr="0부터 1까지 0.1씩 눈금 수직선: 0에서 0.4씩 두 번 뛰어 0.8에 닿음"/>
           <p:cNvSpPr/>
           <p:nvPr/>
         </p:nvSpPr>
@@ -5318,7 +5228,7 @@
       </p:sp>
       <p:sp>
         <p:nvSpPr>
-          <p:cNvPr id="7" name="S15-mark178"/>
+          <p:cNvPr id="7" name="S15-mark175"/>
           <p:cNvSpPr/>
           <p:nvPr/>
         </p:nvSpPr>
@@ -5343,7 +5253,7 @@
       </p:sp>
       <p:sp>
         <p:nvSpPr>
-          <p:cNvPr id="8" name="S15-mark179"/>
+          <p:cNvPr id="8" name="S15-mark176"/>
           <p:cNvSpPr/>
           <p:nvPr/>
         </p:nvSpPr>
@@ -5366,7 +5276,7 @@
       </p:sp>
       <p:sp>
         <p:nvSpPr>
-          <p:cNvPr id="9" name="S15-mark180"/>
+          <p:cNvPr id="9" name="S15-mark177"/>
           <p:cNvSpPr/>
           <p:nvPr/>
         </p:nvSpPr>
@@ -5389,7 +5299,7 @@
       </p:sp>
       <p:sp>
         <p:nvSpPr>
-          <p:cNvPr id="10" name="S15-mark181"/>
+          <p:cNvPr id="10" name="S15-mark178"/>
           <p:cNvSpPr/>
           <p:nvPr/>
         </p:nvSpPr>
@@ -5412,7 +5322,7 @@
       </p:sp>
       <p:sp>
         <p:nvSpPr>
-          <p:cNvPr id="11" name="S15-mark182"/>
+          <p:cNvPr id="11" name="S15-mark179"/>
           <p:cNvSpPr/>
           <p:nvPr/>
         </p:nvSpPr>
@@ -5435,7 +5345,7 @@
       </p:sp>
       <p:sp>
         <p:nvSpPr>
-          <p:cNvPr id="12" name="S15-mark183"/>
+          <p:cNvPr id="12" name="S15-mark180"/>
           <p:cNvSpPr/>
           <p:nvPr/>
         </p:nvSpPr>
@@ -5458,7 +5368,7 @@
       </p:sp>
       <p:sp>
         <p:nvSpPr>
-          <p:cNvPr id="13" name="S15-mark184"/>
+          <p:cNvPr id="13" name="S15-mark181"/>
           <p:cNvSpPr/>
           <p:nvPr/>
         </p:nvSpPr>
@@ -5481,7 +5391,7 @@
       </p:sp>
       <p:sp>
         <p:nvSpPr>
-          <p:cNvPr id="14" name="S15-mark185"/>
+          <p:cNvPr id="14" name="S15-mark182"/>
           <p:cNvSpPr/>
           <p:nvPr/>
         </p:nvSpPr>
@@ -5504,7 +5414,7 @@
       </p:sp>
       <p:sp>
         <p:nvSpPr>
-          <p:cNvPr id="15" name="S15-mark186"/>
+          <p:cNvPr id="15" name="S15-mark183"/>
           <p:cNvSpPr/>
           <p:nvPr/>
         </p:nvSpPr>
@@ -5527,7 +5437,7 @@
       </p:sp>
       <p:sp>
         <p:nvSpPr>
-          <p:cNvPr id="16" name="S15-mark187"/>
+          <p:cNvPr id="16" name="S15-mark184"/>
           <p:cNvSpPr/>
           <p:nvPr/>
         </p:nvSpPr>
@@ -5550,7 +5460,7 @@
       </p:sp>
       <p:sp>
         <p:nvSpPr>
-          <p:cNvPr id="17" name="S15-mark188"/>
+          <p:cNvPr id="17" name="S15-mark185"/>
           <p:cNvSpPr/>
           <p:nvPr/>
         </p:nvSpPr>
@@ -5573,7 +5483,7 @@
       </p:sp>
       <p:sp>
         <p:nvSpPr>
-          <p:cNvPr id="18" name="S15-mark189"/>
+          <p:cNvPr id="18" name="S15-mark186"/>
           <p:cNvSpPr/>
           <p:nvPr/>
         </p:nvSpPr>
@@ -5596,7 +5506,7 @@
       </p:sp>
       <p:sp>
         <p:nvSpPr>
-          <p:cNvPr id="19" name="S15-mark190"/>
+          <p:cNvPr id="19" name="S15-mark187"/>
           <p:cNvSpPr/>
           <p:nvPr/>
         </p:nvSpPr>
@@ -5619,7 +5529,7 @@
       </p:sp>
       <p:sp>
         <p:nvSpPr>
-          <p:cNvPr id="20" name="S15-mark191"/>
+          <p:cNvPr id="20" name="S15-mark188"/>
           <p:cNvSpPr/>
           <p:nvPr/>
         </p:nvSpPr>
@@ -5643,7 +5553,7 @@
       </p:sp>
       <p:sp>
         <p:nvSpPr>
-          <p:cNvPr id="21" name="S15-mark192"/>
+          <p:cNvPr id="21" name="S15-mark189"/>
           <p:cNvSpPr/>
           <p:nvPr/>
         </p:nvSpPr>
@@ -5666,7 +5576,7 @@
       </p:sp>
       <p:sp>
         <p:nvSpPr>
-          <p:cNvPr id="22" name="S15-mark193"/>
+          <p:cNvPr id="22" name="S15-mark190"/>
           <p:cNvSpPr/>
           <p:nvPr/>
         </p:nvSpPr>
@@ -5690,7 +5600,7 @@
       </p:sp>
       <p:sp>
         <p:nvSpPr>
-          <p:cNvPr id="23" name="S15-label195"/>
+          <p:cNvPr id="23" name="S15-label192"/>
           <p:cNvSpPr txBox="1"/>
           <p:nvPr/>
         </p:nvSpPr>
@@ -5729,7 +5639,7 @@
       </p:sp>
       <p:sp>
         <p:nvSpPr>
-          <p:cNvPr id="24" name="S15-label197"/>
+          <p:cNvPr id="24" name="S15-label194"/>
           <p:cNvSpPr txBox="1"/>
           <p:nvPr/>
         </p:nvSpPr>
@@ -5768,7 +5678,7 @@
       </p:sp>
       <p:sp>
         <p:nvSpPr>
-          <p:cNvPr id="25" name="S15-label199"/>
+          <p:cNvPr id="25" name="S15-label196"/>
           <p:cNvSpPr txBox="1"/>
           <p:nvPr/>
         </p:nvSpPr>
@@ -5807,7 +5717,7 @@
       </p:sp>
       <p:sp>
         <p:nvSpPr>
-          <p:cNvPr id="26" name="S15-label201"/>
+          <p:cNvPr id="26" name="S15-label198"/>
           <p:cNvSpPr txBox="1"/>
           <p:nvPr/>
         </p:nvSpPr>
@@ -5846,7 +5756,7 @@
       </p:sp>
       <p:sp>
         <p:nvSpPr>
-          <p:cNvPr id="27" name="S15-label203"/>
+          <p:cNvPr id="27" name="S15-label200"/>
           <p:cNvSpPr txBox="1"/>
           <p:nvPr/>
         </p:nvSpPr>
@@ -5885,7 +5795,7 @@
       </p:sp>
       <p:sp>
         <p:nvSpPr>
-          <p:cNvPr id="28" name="S15-label205"/>
+          <p:cNvPr id="28" name="S15-label202"/>
           <p:cNvSpPr txBox="1"/>
           <p:nvPr/>
         </p:nvSpPr>

--- a/dist/초5/수학/곱셈과어림/초5_수학_곱셈과어림_05_소수의곱셈_학생용.pptx
+++ b/dist/초5/수학/곱셈과어림/초5_수학_곱셈과어림_05_소수의곱셈_학생용.pptx
@@ -120,13 +120,13 @@
   <p:extLst>
     <p:ext uri="{521415D9-36F7-43E2-AB2F-B90AF26B5E84}">
       <p14:sectionLst xmlns:p14="http://schemas.microsoft.com/office/powerpoint/2010/main">
-        <p14:section name="도입" id="{4fa03e5d-37c3-a7bc-f863-2f860de8faba}">
+        <p14:section name="도입" id="{20475184-6d8c-e516-1c59-2b95c05108e1}">
           <p14:sldIdLst>
             <p14:sldId id="256"/>
             <p14:sldId id="257"/>
           </p14:sldIdLst>
         </p14:section>
-        <p14:section name="개념" id="{b89e28ca-66fa-ba94-ce03-edcac2983271}">
+        <p14:section name="개념" id="{7513b054-1421-f585-7ad2-1ac5202db95d}">
           <p14:sldIdLst>
             <p14:sldId id="258"/>
             <p14:sldId id="259"/>
@@ -135,31 +135,31 @@
             <p14:sldId id="263"/>
           </p14:sldIdLst>
         </p14:section>
-        <p14:section name="연습" id="{ab6b0344-f836-f434-3f58-ba85f18813b5}">
+        <p14:section name="연습" id="{476afdf5-5e04-7075-3222-71aac48ac12a}">
           <p14:sldIdLst>
             <p14:sldId id="260"/>
             <p14:sldId id="264"/>
             <p14:sldId id="265"/>
           </p14:sldIdLst>
         </p14:section>
-        <p14:section name="개념" id="{8c56f12d-c8d4-6f42-981c-1154967292dd}">
+        <p14:section name="개념" id="{e3819590-3c68-7f9e-94d1-aaaa3ced92ac}">
           <p14:sldIdLst/>
         </p14:section>
-        <p14:section name="연습" id="{57d43123-1bdb-9f88-337a-3af50eb1fad4}">
+        <p14:section name="연습" id="{9d17406a-177a-0999-8c0e-448ca432a54e}">
           <p14:sldIdLst/>
         </p14:section>
-        <p14:section name="확인" id="{648339c8-3a98-4a5a-6480-e0659589a349}">
+        <p14:section name="확인" id="{f8a4acb4-1bbe-2915-7e1a-89c0f52110b9}">
           <p14:sldIdLst>
             <p14:sldId id="266"/>
             <p14:sldId id="267"/>
           </p14:sldIdLst>
         </p14:section>
-        <p14:section name="정리" id="{0a7f2562-f3f7-7d14-f9da-463af41f0c2b}">
+        <p14:section name="정리" id="{ff226afd-5322-345d-6719-801a2e01bd1e}">
           <p14:sldIdLst>
             <p14:sldId id="268"/>
           </p14:sldIdLst>
         </p14:section>
-        <p14:section name="보충" id="{b0172851-cb9b-fbd3-42c9-5c0851119359}">
+        <p14:section name="보충" id="{bbd19463-2ee1-7caf-c262-7b65c2aca90c}">
           <p14:sldIdLst>
             <p14:sldId id="269"/>
           </p14:sldIdLst>
